--- a/docs/slides/reviewed/Presentation_Group11_Sprint1.pptx
+++ b/docs/slides/reviewed/Presentation_Group11_Sprint1.pptx
@@ -978,7 +978,7 @@
               <a:rPr lang="en-US" dirty="0"/>
               <a:t>SLIDE 5 - Business value (0:30)
 What does that buy? Out of 120 batches, 2 arrive late instead of 41: ninety-five percent fewer than random. That's the course simulator, not a factory. And no batch goes where it can't be made, every decision is on record, and an impossible date is flagged on day one, with options. The price: about a third more than the cheapest rule, which is late nine times in ten.
-Q&amp;A: cost per replay 115,592 for our desk, 111,780 for random, 85,960 for cheapest; ratio to cheapest 1.34 (source cost units, not dollars).</a:t>
+Q&amp;A: cost per replay 115,592 for our desk, 111,780 for random, 85,960 for cheapest; ratio to cheapest 1.34 (shown as $; the data gives cost per piece with no currency, so say so if asked).</a:t>
             </a:r>
             <a:endParaRPr lang="en-US" dirty="0"/>
           </a:p>
@@ -7917,7 +7917,7 @@
                 <a:ea typeface="Arial" pitchFamily="34" charset="-122"/>
                 <a:cs typeface="Arial" pitchFamily="34" charset="-120"/>
               </a:rPr>
-              <a:t>115.6k cost units per run, against 86.0k for always-cheapest (late on 92% of batches) and 111.8k for random.</a:t>
+              <a:t>$115.6k per run, against $86.0k for always-cheapest (late on 92% of batches) and $111.8k for random.</a:t>
             </a:r>
             <a:endParaRPr lang="en-US" sz="1050" dirty="0"/>
           </a:p>

--- a/docs/slides/reviewed/Presentation_Group11_Sprint1.pptx
+++ b/docs/slides/reviewed/Presentation_Group11_Sprint1.pptx
@@ -2303,7 +2303,7 @@
                 <a:ea typeface="Arial" pitchFamily="34" charset="-122"/>
                 <a:cs typeface="Arial" pitchFamily="34" charset="-120"/>
               </a:rPr>
-              <a:t>Niyanthri Rajeswari Sridhar (A0351151U) — Present (in person)</a:t>
+              <a:t>Sridhar Niyanthri Rajeswari (A0351151U) — Present (in person)</a:t>
             </a:r>
             <a:endParaRPr lang="en-US" sz="850" dirty="0"/>
           </a:p>

--- a/docs/slides/reviewed/Presentation_Group11_Sprint1.pptx
+++ b/docs/slides/reviewed/Presentation_Group11_Sprint1.pptx
@@ -1975,7 +1975,7 @@
                 <a:ea typeface="Arial" pitchFamily="34" charset="-122"/>
                 <a:cs typeface="Arial" pitchFamily="34" charset="-120"/>
               </a:rPr>
-              <a:t>GROUP 11  /  TRACK 2  /  SPRINT 1 REVIEW</a:t>
+              <a:t>GROUP 11 — TRACK 2  /  SPRINT 1 REVIEW</a:t>
             </a:r>
             <a:endParaRPr lang="en-US" sz="850" dirty="0"/>
           </a:p>
@@ -10102,23 +10102,23 @@
         <p:spPr>
           <a:xfrm>
             <a:off x="2286000" y="1298448"/>
-            <a:ext cx="1188720" cy="182880"/>
-          </a:xfrm>
-          <a:prstGeom prst="rect">
-            <a:avLst/>
-          </a:prstGeom>
-          <a:noFill/>
-          <a:ln/>
-        </p:spPr>
-        <p:txBody>
-          <a:bodyPr wrap="square" lIns="0" tIns="0" rIns="0" bIns="0" rtlCol="0" anchor="t"/>
-          <a:lstStyle/>
-          <a:p>
-            <a:pPr indent="0" marL="0">
-              <a:buNone/>
-            </a:pPr>
-            <a:r>
-              <a:rPr lang="en-US" sz="700" b="1" spc="150" kern="0" dirty="0">
+            <a:ext cx="1261872" cy="182880"/>
+          </a:xfrm>
+          <a:prstGeom prst="rect">
+            <a:avLst/>
+          </a:prstGeom>
+          <a:noFill/>
+          <a:ln/>
+        </p:spPr>
+        <p:txBody>
+          <a:bodyPr wrap="square" lIns="0" tIns="0" rIns="0" bIns="0" rtlCol="0" anchor="t"/>
+          <a:lstStyle/>
+          <a:p>
+            <a:pPr indent="0" marL="0">
+              <a:buNone/>
+            </a:pPr>
+            <a:r>
+              <a:rPr lang="en-US" sz="700" b="1" spc="50" kern="0" dirty="0">
                 <a:solidFill>
                   <a:srgbClr val="6B665D"/>
                 </a:solidFill>
@@ -10126,7 +10126,7 @@
                 <a:ea typeface="Arial" pitchFamily="34" charset="-122"/>
                 <a:cs typeface="Arial" pitchFamily="34" charset="-120"/>
               </a:rPr>
-              <a:t>CHANCE / IMPACT</a:t>
+              <a:t>PROBABILITY / IMPACT</a:t>
             </a:r>
             <a:endParaRPr lang="en-US" sz="700" dirty="0"/>
           </a:p>
@@ -10165,7 +10165,7 @@
                 <a:ea typeface="Arial" pitchFamily="34" charset="-122"/>
                 <a:cs typeface="Arial" pitchFamily="34" charset="-120"/>
               </a:rPr>
-              <a:t>WHAT WE DO ABOUT IT</a:t>
+              <a:t>MITIGATION</a:t>
             </a:r>
             <a:endParaRPr lang="en-US" sz="700" dirty="0"/>
           </a:p>
@@ -11029,7 +11029,7 @@
         <p:spPr>
           <a:xfrm>
             <a:off x="6172200" y="1572768"/>
-            <a:ext cx="2423160" cy="603504"/>
+            <a:ext cx="2423160" cy="658368"/>
           </a:xfrm>
           <a:prstGeom prst="rect">
             <a:avLst/>
@@ -11053,17 +11053,17 @@
         </p:nvSpPr>
         <p:spPr>
           <a:xfrm>
-            <a:off x="6309360" y="1645920"/>
-            <a:ext cx="2194560" cy="475488"/>
-          </a:xfrm>
-          <a:prstGeom prst="rect">
-            <a:avLst/>
-          </a:prstGeom>
-          <a:noFill/>
-          <a:ln/>
-        </p:spPr>
-        <p:txBody>
-          <a:bodyPr wrap="square" lIns="0" tIns="0" rIns="0" bIns="0" rtlCol="0" anchor="ctr"/>
+            <a:off x="6309360" y="1636776"/>
+            <a:ext cx="2194560" cy="292608"/>
+          </a:xfrm>
+          <a:prstGeom prst="rect">
+            <a:avLst/>
+          </a:prstGeom>
+          <a:noFill/>
+          <a:ln/>
+        </p:spPr>
+        <p:txBody>
+          <a:bodyPr wrap="square" lIns="0" tIns="0" rIns="0" bIns="0" rtlCol="0" anchor="t"/>
           <a:lstStyle/>
           <a:p>
             <a:pPr indent="0" marL="0">
@@ -11086,14 +11086,86 @@
       </p:sp>
       <p:sp>
         <p:nvSpPr>
-          <p:cNvPr id="30" name="Shape 28"/>
+          <p:cNvPr id="30" name="Text 28"/>
+          <p:cNvSpPr txBox="1"/>
+          <p:nvPr/>
+        </p:nvSpPr>
+        <p:spPr>
+          <a:xfrm>
+            <a:off x="6309360" y="1947672"/>
+            <a:ext cx="2194560" cy="237744"/>
+          </a:xfrm>
+          <a:prstGeom prst="rect">
+            <a:avLst/>
+          </a:prstGeom>
+          <a:noFill/>
+          <a:ln/>
+        </p:spPr>
+        <p:txBody>
+          <a:bodyPr wrap="square" lIns="0" tIns="0" rIns="0" bIns="0" rtlCol="0" anchor="t"/>
+          <a:lstStyle/>
+          <a:p>
+            <a:pPr indent="0" marL="0">
+              <a:buNone/>
+            </a:pPr>
+            <a:r>
+              <a:rPr lang="en-US" sz="700" b="1" dirty="0">
+                <a:solidFill>
+                  <a:srgbClr val="1D1B18"/>
+                </a:solidFill>
+                <a:latin typeface="Arial" pitchFamily="34" charset="0"/>
+                <a:ea typeface="Arial" pitchFamily="34" charset="-122"/>
+                <a:cs typeface="Arial" pitchFamily="34" charset="-120"/>
+              </a:rPr>
+              <a:t>Check: </a:t>
+            </a:r>
+            <a:r>
+              <a:rPr lang="en-US" sz="700" dirty="0">
+                <a:solidFill>
+                  <a:srgbClr val="4A463F"/>
+                </a:solidFill>
+                <a:latin typeface="Arial" pitchFamily="34" charset="0"/>
+                <a:ea typeface="Arial" pitchFamily="34" charset="-122"/>
+                <a:cs typeface="Arial" pitchFamily="34" charset="-120"/>
+              </a:rPr>
+              <a:t>The data sets no order for requests; confirm with the course team. </a:t>
+            </a:r>
+            <a:r>
+              <a:rPr lang="en-US" sz="700" b="1" dirty="0">
+                <a:solidFill>
+                  <a:srgbClr val="1D1B18"/>
+                </a:solidFill>
+                <a:latin typeface="Arial" pitchFamily="34" charset="0"/>
+                <a:ea typeface="Arial" pitchFamily="34" charset="-122"/>
+                <a:cs typeface="Arial" pitchFamily="34" charset="-120"/>
+              </a:rPr>
+              <a:t>Risk if wrong: </a:t>
+            </a:r>
+            <a:r>
+              <a:rPr lang="en-US" sz="700" b="1" dirty="0">
+                <a:solidFill>
+                  <a:srgbClr val="7D5E30"/>
+                </a:solidFill>
+                <a:latin typeface="Arial" pitchFamily="34" charset="0"/>
+                <a:ea typeface="Arial" pitchFamily="34" charset="-122"/>
+                <a:cs typeface="Arial" pitchFamily="34" charset="-120"/>
+              </a:rPr>
+              <a:t>Medium</a:t>
+            </a:r>
+            <a:endParaRPr lang="en-US" sz="700" dirty="0"/>
+          </a:p>
+        </p:txBody>
+      </p:sp>
+      <p:sp>
+        <p:nvSpPr>
+          <p:cNvPr id="31" name="Shape 29"/>
           <p:cNvSpPr/>
           <p:nvPr/>
         </p:nvSpPr>
         <p:spPr>
           <a:xfrm>
-            <a:off x="6172200" y="2276856"/>
-            <a:ext cx="2423160" cy="603504"/>
+            <a:off x="6172200" y="2304288"/>
+            <a:ext cx="2423160" cy="658368"/>
           </a:xfrm>
           <a:prstGeom prst="rect">
             <a:avLst/>
@@ -11111,23 +11183,23 @@
       </p:sp>
       <p:sp>
         <p:nvSpPr>
-          <p:cNvPr id="31" name="Text 29"/>
-          <p:cNvSpPr txBox="1"/>
-          <p:nvPr/>
-        </p:nvSpPr>
-        <p:spPr>
-          <a:xfrm>
-            <a:off x="6309360" y="2350008"/>
-            <a:ext cx="2194560" cy="475488"/>
-          </a:xfrm>
-          <a:prstGeom prst="rect">
-            <a:avLst/>
-          </a:prstGeom>
-          <a:noFill/>
-          <a:ln/>
-        </p:spPr>
-        <p:txBody>
-          <a:bodyPr wrap="square" lIns="0" tIns="0" rIns="0" bIns="0" rtlCol="0" anchor="ctr"/>
+          <p:cNvPr id="32" name="Text 30"/>
+          <p:cNvSpPr txBox="1"/>
+          <p:nvPr/>
+        </p:nvSpPr>
+        <p:spPr>
+          <a:xfrm>
+            <a:off x="6309360" y="2368296"/>
+            <a:ext cx="2194560" cy="292608"/>
+          </a:xfrm>
+          <a:prstGeom prst="rect">
+            <a:avLst/>
+          </a:prstGeom>
+          <a:noFill/>
+          <a:ln/>
+        </p:spPr>
+        <p:txBody>
+          <a:bodyPr wrap="square" lIns="0" tIns="0" rIns="0" bIns="0" rtlCol="0" anchor="t"/>
           <a:lstStyle/>
           <a:p>
             <a:pPr indent="0" marL="0">
@@ -11150,14 +11222,86 @@
       </p:sp>
       <p:sp>
         <p:nvSpPr>
-          <p:cNvPr id="32" name="Shape 30"/>
+          <p:cNvPr id="33" name="Text 31"/>
+          <p:cNvSpPr txBox="1"/>
+          <p:nvPr/>
+        </p:nvSpPr>
+        <p:spPr>
+          <a:xfrm>
+            <a:off x="6309360" y="2679192"/>
+            <a:ext cx="2194560" cy="237744"/>
+          </a:xfrm>
+          <a:prstGeom prst="rect">
+            <a:avLst/>
+          </a:prstGeom>
+          <a:noFill/>
+          <a:ln/>
+        </p:spPr>
+        <p:txBody>
+          <a:bodyPr wrap="square" lIns="0" tIns="0" rIns="0" bIns="0" rtlCol="0" anchor="t"/>
+          <a:lstStyle/>
+          <a:p>
+            <a:pPr indent="0" marL="0">
+              <a:buNone/>
+            </a:pPr>
+            <a:r>
+              <a:rPr lang="en-US" sz="700" b="1" dirty="0">
+                <a:solidFill>
+                  <a:srgbClr val="1D1B18"/>
+                </a:solidFill>
+                <a:latin typeface="Arial" pitchFamily="34" charset="0"/>
+                <a:ea typeface="Arial" pitchFamily="34" charset="-122"/>
+                <a:cs typeface="Arial" pitchFamily="34" charset="-120"/>
+              </a:rPr>
+              <a:t>Check: </a:t>
+            </a:r>
+            <a:r>
+              <a:rPr lang="en-US" sz="700" dirty="0">
+                <a:solidFill>
+                  <a:srgbClr val="4A463F"/>
+                </a:solidFill>
+                <a:latin typeface="Arial" pitchFamily="34" charset="0"/>
+                <a:ea typeface="Arial" pitchFamily="34" charset="-122"/>
+                <a:cs typeface="Arial" pitchFamily="34" charset="-120"/>
+              </a:rPr>
+              <a:t>simulate.py adds 1.5x the work days; confirm with dispatchers. </a:t>
+            </a:r>
+            <a:r>
+              <a:rPr lang="en-US" sz="700" b="1" dirty="0">
+                <a:solidFill>
+                  <a:srgbClr val="1D1B18"/>
+                </a:solidFill>
+                <a:latin typeface="Arial" pitchFamily="34" charset="0"/>
+                <a:ea typeface="Arial" pitchFamily="34" charset="-122"/>
+                <a:cs typeface="Arial" pitchFamily="34" charset="-120"/>
+              </a:rPr>
+              <a:t>Risk if wrong: </a:t>
+            </a:r>
+            <a:r>
+              <a:rPr lang="en-US" sz="700" b="1" dirty="0">
+                <a:solidFill>
+                  <a:srgbClr val="7D5E30"/>
+                </a:solidFill>
+                <a:latin typeface="Arial" pitchFamily="34" charset="0"/>
+                <a:ea typeface="Arial" pitchFamily="34" charset="-122"/>
+                <a:cs typeface="Arial" pitchFamily="34" charset="-120"/>
+              </a:rPr>
+              <a:t>Medium</a:t>
+            </a:r>
+            <a:endParaRPr lang="en-US" sz="700" dirty="0"/>
+          </a:p>
+        </p:txBody>
+      </p:sp>
+      <p:sp>
+        <p:nvSpPr>
+          <p:cNvPr id="34" name="Shape 32"/>
           <p:cNvSpPr/>
           <p:nvPr/>
         </p:nvSpPr>
         <p:spPr>
           <a:xfrm>
-            <a:off x="6172200" y="2980944"/>
-            <a:ext cx="2423160" cy="603504"/>
+            <a:off x="6172200" y="3035808"/>
+            <a:ext cx="2423160" cy="658368"/>
           </a:xfrm>
           <a:prstGeom prst="rect">
             <a:avLst/>
@@ -11175,23 +11319,23 @@
       </p:sp>
       <p:sp>
         <p:nvSpPr>
-          <p:cNvPr id="33" name="Text 31"/>
-          <p:cNvSpPr txBox="1"/>
-          <p:nvPr/>
-        </p:nvSpPr>
-        <p:spPr>
-          <a:xfrm>
-            <a:off x="6309360" y="3054096"/>
-            <a:ext cx="2194560" cy="475488"/>
-          </a:xfrm>
-          <a:prstGeom prst="rect">
-            <a:avLst/>
-          </a:prstGeom>
-          <a:noFill/>
-          <a:ln/>
-        </p:spPr>
-        <p:txBody>
-          <a:bodyPr wrap="square" lIns="0" tIns="0" rIns="0" bIns="0" rtlCol="0" anchor="ctr"/>
+          <p:cNvPr id="35" name="Text 33"/>
+          <p:cNvSpPr txBox="1"/>
+          <p:nvPr/>
+        </p:nvSpPr>
+        <p:spPr>
+          <a:xfrm>
+            <a:off x="6309360" y="3099816"/>
+            <a:ext cx="2194560" cy="292608"/>
+          </a:xfrm>
+          <a:prstGeom prst="rect">
+            <a:avLst/>
+          </a:prstGeom>
+          <a:noFill/>
+          <a:ln/>
+        </p:spPr>
+        <p:txBody>
+          <a:bodyPr wrap="square" lIns="0" tIns="0" rIns="0" bIns="0" rtlCol="0" anchor="t"/>
           <a:lstStyle/>
           <a:p>
             <a:pPr indent="0" marL="0">
@@ -11206,7 +11350,7 @@
                 <a:ea typeface="Arial" pitchFamily="34" charset="-122"/>
                 <a:cs typeface="Arial" pitchFamily="34" charset="-120"/>
               </a:rPr>
-              <a:t>Workshop prices are our subcontract cost, not the customer’s price, so price questions are declined.</a:t>
+              <a:t>Workshop prices are our subcontract cost, not the customer’s price.</a:t>
             </a:r>
             <a:endParaRPr lang="en-US" sz="900" dirty="0"/>
           </a:p>
@@ -11214,14 +11358,86 @@
       </p:sp>
       <p:sp>
         <p:nvSpPr>
-          <p:cNvPr id="34" name="Shape 32"/>
+          <p:cNvPr id="36" name="Text 34"/>
+          <p:cNvSpPr txBox="1"/>
+          <p:nvPr/>
+        </p:nvSpPr>
+        <p:spPr>
+          <a:xfrm>
+            <a:off x="6309360" y="3410712"/>
+            <a:ext cx="2194560" cy="237744"/>
+          </a:xfrm>
+          <a:prstGeom prst="rect">
+            <a:avLst/>
+          </a:prstGeom>
+          <a:noFill/>
+          <a:ln/>
+        </p:spPr>
+        <p:txBody>
+          <a:bodyPr wrap="square" lIns="0" tIns="0" rIns="0" bIns="0" rtlCol="0" anchor="t"/>
+          <a:lstStyle/>
+          <a:p>
+            <a:pPr indent="0" marL="0">
+              <a:buNone/>
+            </a:pPr>
+            <a:r>
+              <a:rPr lang="en-US" sz="700" b="1" dirty="0">
+                <a:solidFill>
+                  <a:srgbClr val="1D1B18"/>
+                </a:solidFill>
+                <a:latin typeface="Arial" pitchFamily="34" charset="0"/>
+                <a:ea typeface="Arial" pitchFamily="34" charset="-122"/>
+                <a:cs typeface="Arial" pitchFamily="34" charset="-120"/>
+              </a:rPr>
+              <a:t>Check: </a:t>
+            </a:r>
+            <a:r>
+              <a:rPr lang="en-US" sz="700" dirty="0">
+                <a:solidFill>
+                  <a:srgbClr val="4A463F"/>
+                </a:solidFill>
+                <a:latin typeface="Arial" pitchFamily="34" charset="0"/>
+                <a:ea typeface="Arial" pitchFamily="34" charset="-122"/>
+                <a:cs typeface="Arial" pitchFamily="34" charset="-120"/>
+              </a:rPr>
+              <a:t>workshops.csv has cost per piece and no selling prices. </a:t>
+            </a:r>
+            <a:r>
+              <a:rPr lang="en-US" sz="700" b="1" dirty="0">
+                <a:solidFill>
+                  <a:srgbClr val="1D1B18"/>
+                </a:solidFill>
+                <a:latin typeface="Arial" pitchFamily="34" charset="0"/>
+                <a:ea typeface="Arial" pitchFamily="34" charset="-122"/>
+                <a:cs typeface="Arial" pitchFamily="34" charset="-120"/>
+              </a:rPr>
+              <a:t>Risk if wrong: </a:t>
+            </a:r>
+            <a:r>
+              <a:rPr lang="en-US" sz="700" b="1" dirty="0">
+                <a:solidFill>
+                  <a:srgbClr val="1D1B18"/>
+                </a:solidFill>
+                <a:latin typeface="Arial" pitchFamily="34" charset="0"/>
+                <a:ea typeface="Arial" pitchFamily="34" charset="-122"/>
+                <a:cs typeface="Arial" pitchFamily="34" charset="-120"/>
+              </a:rPr>
+              <a:t>Low</a:t>
+            </a:r>
+            <a:endParaRPr lang="en-US" sz="700" dirty="0"/>
+          </a:p>
+        </p:txBody>
+      </p:sp>
+      <p:sp>
+        <p:nvSpPr>
+          <p:cNvPr id="37" name="Shape 35"/>
           <p:cNvSpPr/>
           <p:nvPr/>
         </p:nvSpPr>
         <p:spPr>
           <a:xfrm>
-            <a:off x="6172200" y="3685032"/>
-            <a:ext cx="2423160" cy="603504"/>
+            <a:off x="6172200" y="3767328"/>
+            <a:ext cx="2423160" cy="658368"/>
           </a:xfrm>
           <a:prstGeom prst="rect">
             <a:avLst/>
@@ -11239,23 +11455,23 @@
       </p:sp>
       <p:sp>
         <p:nvSpPr>
-          <p:cNvPr id="35" name="Text 33"/>
-          <p:cNvSpPr txBox="1"/>
-          <p:nvPr/>
-        </p:nvSpPr>
-        <p:spPr>
-          <a:xfrm>
-            <a:off x="6309360" y="3758184"/>
-            <a:ext cx="2194560" cy="475488"/>
-          </a:xfrm>
-          <a:prstGeom prst="rect">
-            <a:avLst/>
-          </a:prstGeom>
-          <a:noFill/>
-          <a:ln/>
-        </p:spPr>
-        <p:txBody>
-          <a:bodyPr wrap="square" lIns="0" tIns="0" rIns="0" bIns="0" rtlCol="0" anchor="ctr"/>
+          <p:cNvPr id="38" name="Text 36"/>
+          <p:cNvSpPr txBox="1"/>
+          <p:nvPr/>
+        </p:nvSpPr>
+        <p:spPr>
+          <a:xfrm>
+            <a:off x="6309360" y="3831336"/>
+            <a:ext cx="2194560" cy="292608"/>
+          </a:xfrm>
+          <a:prstGeom prst="rect">
+            <a:avLst/>
+          </a:prstGeom>
+          <a:noFill/>
+          <a:ln/>
+        </p:spPr>
+        <p:txBody>
+          <a:bodyPr wrap="square" lIns="0" tIns="0" rIns="0" bIns="0" rtlCol="0" anchor="t"/>
           <a:lstStyle/>
           <a:p>
             <a:pPr indent="0" marL="0">
@@ -11273,6 +11489,78 @@
               <a:t>A person confirms every allocation. No workshop is contacted automatically.</a:t>
             </a:r>
             <a:endParaRPr lang="en-US" sz="900" dirty="0"/>
+          </a:p>
+        </p:txBody>
+      </p:sp>
+      <p:sp>
+        <p:nvSpPr>
+          <p:cNvPr id="39" name="Text 37"/>
+          <p:cNvSpPr txBox="1"/>
+          <p:nvPr/>
+        </p:nvSpPr>
+        <p:spPr>
+          <a:xfrm>
+            <a:off x="6309360" y="4142232"/>
+            <a:ext cx="2194560" cy="237744"/>
+          </a:xfrm>
+          <a:prstGeom prst="rect">
+            <a:avLst/>
+          </a:prstGeom>
+          <a:noFill/>
+          <a:ln/>
+        </p:spPr>
+        <p:txBody>
+          <a:bodyPr wrap="square" lIns="0" tIns="0" rIns="0" bIns="0" rtlCol="0" anchor="t"/>
+          <a:lstStyle/>
+          <a:p>
+            <a:pPr indent="0" marL="0">
+              <a:buNone/>
+            </a:pPr>
+            <a:r>
+              <a:rPr lang="en-US" sz="700" b="1" dirty="0">
+                <a:solidFill>
+                  <a:srgbClr val="1D1B18"/>
+                </a:solidFill>
+                <a:latin typeface="Arial" pitchFamily="34" charset="0"/>
+                <a:ea typeface="Arial" pitchFamily="34" charset="-122"/>
+                <a:cs typeface="Arial" pitchFamily="34" charset="-120"/>
+              </a:rPr>
+              <a:t>Check: </a:t>
+            </a:r>
+            <a:r>
+              <a:rPr lang="en-US" sz="700" dirty="0">
+                <a:solidFill>
+                  <a:srgbClr val="4A463F"/>
+                </a:solidFill>
+                <a:latin typeface="Arial" pitchFamily="34" charset="0"/>
+                <a:ea typeface="Arial" pitchFamily="34" charset="-122"/>
+                <a:cs typeface="Arial" pitchFamily="34" charset="-120"/>
+              </a:rPr>
+              <a:t>Only Confirm writes an allocation (records.py). </a:t>
+            </a:r>
+            <a:r>
+              <a:rPr lang="en-US" sz="700" b="1" dirty="0">
+                <a:solidFill>
+                  <a:srgbClr val="1D1B18"/>
+                </a:solidFill>
+                <a:latin typeface="Arial" pitchFamily="34" charset="0"/>
+                <a:ea typeface="Arial" pitchFamily="34" charset="-122"/>
+                <a:cs typeface="Arial" pitchFamily="34" charset="-120"/>
+              </a:rPr>
+              <a:t>Risk if wrong: </a:t>
+            </a:r>
+            <a:r>
+              <a:rPr lang="en-US" sz="700" b="1" dirty="0">
+                <a:solidFill>
+                  <a:srgbClr val="1D1B18"/>
+                </a:solidFill>
+                <a:latin typeface="Arial" pitchFamily="34" charset="0"/>
+                <a:ea typeface="Arial" pitchFamily="34" charset="-122"/>
+                <a:cs typeface="Arial" pitchFamily="34" charset="-120"/>
+              </a:rPr>
+              <a:t>Low</a:t>
+            </a:r>
+            <a:endParaRPr lang="en-US" sz="700" dirty="0"/>
           </a:p>
         </p:txBody>
       </p:sp>
